--- a/Sessions/2/Embedded Session 2 (C Programing 1).pptx
+++ b/Sessions/2/Embedded Session 2 (C Programing 1).pptx
@@ -280,7 +280,7 @@
           <a:p>
             <a:fld id="{5310F177-2B9D-42C7-87F0-306C299C9BFE}" type="datetimeFigureOut">
               <a:rPr lang="en-US" smtClean="0"/>
-              <a:t>2/21/2026</a:t>
+              <a:t>3/3/2026</a:t>
             </a:fld>
             <a:endParaRPr lang="en-US"/>
           </a:p>
@@ -4459,7 +4459,7 @@
           <a:p>
             <a:fld id="{EB86029A-0DB0-4EA6-8941-FEFA542D9F90}" type="datetimeFigureOut">
               <a:rPr lang="en-US" smtClean="0"/>
-              <a:t>2/21/2026</a:t>
+              <a:t>3/3/2026</a:t>
             </a:fld>
             <a:endParaRPr lang="en-US"/>
           </a:p>
@@ -4657,7 +4657,7 @@
           <a:p>
             <a:fld id="{EB86029A-0DB0-4EA6-8941-FEFA542D9F90}" type="datetimeFigureOut">
               <a:rPr lang="en-US" smtClean="0"/>
-              <a:t>2/21/2026</a:t>
+              <a:t>3/3/2026</a:t>
             </a:fld>
             <a:endParaRPr lang="en-US"/>
           </a:p>
@@ -4865,7 +4865,7 @@
           <a:p>
             <a:fld id="{EB86029A-0DB0-4EA6-8941-FEFA542D9F90}" type="datetimeFigureOut">
               <a:rPr lang="en-US" smtClean="0"/>
-              <a:t>2/21/2026</a:t>
+              <a:t>3/3/2026</a:t>
             </a:fld>
             <a:endParaRPr lang="en-US"/>
           </a:p>
@@ -5063,7 +5063,7 @@
           <a:p>
             <a:fld id="{EB86029A-0DB0-4EA6-8941-FEFA542D9F90}" type="datetimeFigureOut">
               <a:rPr lang="en-US" smtClean="0"/>
-              <a:t>2/21/2026</a:t>
+              <a:t>3/3/2026</a:t>
             </a:fld>
             <a:endParaRPr lang="en-US"/>
           </a:p>
@@ -5338,7 +5338,7 @@
           <a:p>
             <a:fld id="{EB86029A-0DB0-4EA6-8941-FEFA542D9F90}" type="datetimeFigureOut">
               <a:rPr lang="en-US" smtClean="0"/>
-              <a:t>2/21/2026</a:t>
+              <a:t>3/3/2026</a:t>
             </a:fld>
             <a:endParaRPr lang="en-US"/>
           </a:p>
@@ -5603,7 +5603,7 @@
           <a:p>
             <a:fld id="{EB86029A-0DB0-4EA6-8941-FEFA542D9F90}" type="datetimeFigureOut">
               <a:rPr lang="en-US" smtClean="0"/>
-              <a:t>2/21/2026</a:t>
+              <a:t>3/3/2026</a:t>
             </a:fld>
             <a:endParaRPr lang="en-US"/>
           </a:p>
@@ -6015,7 +6015,7 @@
           <a:p>
             <a:fld id="{EB86029A-0DB0-4EA6-8941-FEFA542D9F90}" type="datetimeFigureOut">
               <a:rPr lang="en-US" smtClean="0"/>
-              <a:t>2/21/2026</a:t>
+              <a:t>3/3/2026</a:t>
             </a:fld>
             <a:endParaRPr lang="en-US"/>
           </a:p>
@@ -6156,7 +6156,7 @@
           <a:p>
             <a:fld id="{EB86029A-0DB0-4EA6-8941-FEFA542D9F90}" type="datetimeFigureOut">
               <a:rPr lang="en-US" smtClean="0"/>
-              <a:t>2/21/2026</a:t>
+              <a:t>3/3/2026</a:t>
             </a:fld>
             <a:endParaRPr lang="en-US"/>
           </a:p>
@@ -6269,7 +6269,7 @@
           <a:p>
             <a:fld id="{EB86029A-0DB0-4EA6-8941-FEFA542D9F90}" type="datetimeFigureOut">
               <a:rPr lang="en-US" smtClean="0"/>
-              <a:t>2/21/2026</a:t>
+              <a:t>3/3/2026</a:t>
             </a:fld>
             <a:endParaRPr lang="en-US"/>
           </a:p>
@@ -6580,7 +6580,7 @@
           <a:p>
             <a:fld id="{EB86029A-0DB0-4EA6-8941-FEFA542D9F90}" type="datetimeFigureOut">
               <a:rPr lang="en-US" smtClean="0"/>
-              <a:t>2/21/2026</a:t>
+              <a:t>3/3/2026</a:t>
             </a:fld>
             <a:endParaRPr lang="en-US"/>
           </a:p>
@@ -6868,7 +6868,7 @@
           <a:p>
             <a:fld id="{EB86029A-0DB0-4EA6-8941-FEFA542D9F90}" type="datetimeFigureOut">
               <a:rPr lang="en-US" smtClean="0"/>
-              <a:t>2/21/2026</a:t>
+              <a:t>3/3/2026</a:t>
             </a:fld>
             <a:endParaRPr lang="en-US"/>
           </a:p>
@@ -7109,7 +7109,7 @@
           <a:p>
             <a:fld id="{EB86029A-0DB0-4EA6-8941-FEFA542D9F90}" type="datetimeFigureOut">
               <a:rPr lang="en-US" smtClean="0"/>
-              <a:t>2/21/2026</a:t>
+              <a:t>3/3/2026</a:t>
             </a:fld>
             <a:endParaRPr lang="en-US"/>
           </a:p>
@@ -19517,17 +19517,9 @@
             </a:r>
           </a:p>
           <a:p>
-            <a:pPr marL="0" marR="0" lvl="0" indent="0" algn="l" rtl="0">
-              <a:spcBef>
-                <a:spcPts val="0"/>
-              </a:spcBef>
-              <a:spcAft>
-                <a:spcPts val="0"/>
-              </a:spcAft>
-              <a:buNone/>
-            </a:pPr>
-            <a:r>
-              <a:rPr lang="en-US" sz="3200" b="1" dirty="0" err="1">
+            <a:pPr lvl="0"/>
+            <a:r>
+              <a:rPr lang="en-US" sz="3200" b="1">
                 <a:solidFill>
                   <a:srgbClr val="FFFFFF"/>
                 </a:solidFill>
@@ -19536,20 +19528,17 @@
                 <a:cs typeface="Arial"/>
                 <a:sym typeface="Arial"/>
               </a:rPr>
-              <a:t>hisEmailHere</a:t>
-            </a:r>
-            <a:r>
-              <a:rPr lang="en-US" sz="3200" b="1" dirty="0">
-                <a:solidFill>
-                  <a:srgbClr val="FFFFFF"/>
-                </a:solidFill>
-                <a:latin typeface="Arial"/>
-                <a:ea typeface="Arial"/>
-                <a:cs typeface="Arial"/>
-                <a:sym typeface="Arial"/>
-              </a:rPr>
-              <a:t>.</a:t>
-            </a:r>
+              <a:t>marwanalaamohammed@gmail.com.</a:t>
+            </a:r>
+            <a:endParaRPr lang="en-US" sz="3200" b="1" dirty="0">
+              <a:solidFill>
+                <a:srgbClr val="FFFFFF"/>
+              </a:solidFill>
+              <a:latin typeface="Arial"/>
+              <a:ea typeface="Arial"/>
+              <a:cs typeface="Arial"/>
+              <a:sym typeface="Arial"/>
+            </a:endParaRPr>
           </a:p>
         </p:txBody>
       </p:sp>
@@ -30422,18 +30411,6 @@
               </a:spcAft>
               <a:buNone/>
             </a:pPr>
-            <a:r>
-              <a:rPr lang="en-GB" sz="4800" dirty="0">
-                <a:solidFill>
-                  <a:schemeClr val="lt1"/>
-                </a:solidFill>
-                <a:latin typeface="Arial"/>
-                <a:ea typeface="Arial"/>
-                <a:cs typeface="Arial"/>
-                <a:sym typeface="Arial"/>
-              </a:rPr>
-              <a:t>QR Code Placed Here</a:t>
-            </a:r>
             <a:endParaRPr sz="4800" dirty="0">
               <a:solidFill>
                 <a:schemeClr val="lt1"/>
@@ -30794,6 +30771,36 @@
           <a:ln>
             <a:noFill/>
           </a:ln>
+        </p:spPr>
+      </p:pic>
+      <p:pic>
+        <p:nvPicPr>
+          <p:cNvPr id="15" name="Picture 14" descr="A qr code on a white background&#10;&#10;AI-generated content may be incorrect.">
+            <a:extLst>
+              <a:ext uri="{FF2B5EF4-FFF2-40B4-BE49-F238E27FC236}">
+                <a16:creationId xmlns:a16="http://schemas.microsoft.com/office/drawing/2014/main" id="{1CF4AE31-220F-CE78-AE26-AD91DE06A2B6}"/>
+              </a:ext>
+            </a:extLst>
+          </p:cNvPr>
+          <p:cNvPicPr>
+            <a:picLocks noChangeAspect="1"/>
+          </p:cNvPicPr>
+          <p:nvPr/>
+        </p:nvPicPr>
+        <p:blipFill>
+          <a:blip r:embed="rId6"/>
+          <a:stretch>
+            <a:fillRect/>
+          </a:stretch>
+        </p:blipFill>
+        <p:spPr>
+          <a:xfrm>
+            <a:off x="4063325" y="1356313"/>
+            <a:ext cx="4065349" cy="4145374"/>
+          </a:xfrm>
+          <a:prstGeom prst="rect">
+            <a:avLst/>
+          </a:prstGeom>
         </p:spPr>
       </p:pic>
     </p:spTree>
